--- a/m4/diapositivos/aula-15-frei-luis-quem-sabia.pptx
+++ b/m4/diapositivos/aula-15-frei-luis-quem-sabia.pptx
@@ -8268,7 +8268,7 @@
         <p:spPr>
           <a:xfrm>
             <a:off x="1005840" y="2697480"/>
-            <a:ext cx="0" cy="2182368"/>
+            <a:ext cx="0" cy="1801368"/>
           </a:xfrm>
           <a:prstGeom prst="line">
             <a:avLst/>
@@ -8355,7 +8355,7 @@
         <p:spPr>
           <a:xfrm>
             <a:off x="1417320" y="2523744"/>
-            <a:ext cx="9174175" cy="981456"/>
+            <a:ext cx="9174175" cy="600456"/>
           </a:xfrm>
           <a:prstGeom prst="rect">
             <a:avLst/>
@@ -8384,7 +8384,7 @@
                 <a:ea typeface="Arial" pitchFamily="34" charset="-122"/>
                 <a:cs typeface="Arial" pitchFamily="34" charset="-120"/>
               </a:rPr>
-              <a:t>Telmo omite o nome; Maria chama a isso não dizer «a verdade toda», que é «quase o mesmo» que mentir</a:t>
+              <a:t>Telmo omite o nome; Maria diz que é quase mentir</a:t>
             </a:r>
             <a:endParaRPr lang="en-US" sz="2400" dirty="0"/>
           </a:p>
@@ -8398,7 +8398,7 @@
         </p:nvSpPr>
         <p:spPr>
           <a:xfrm>
-            <a:off x="822960" y="3496056"/>
+            <a:off x="822960" y="3115056"/>
             <a:ext cx="365760" cy="365760"/>
           </a:xfrm>
           <a:prstGeom prst="ellipse">
@@ -8423,7 +8423,7 @@
         </p:nvSpPr>
         <p:spPr>
           <a:xfrm>
-            <a:off x="822960" y="3496056"/>
+            <a:off x="822960" y="3115056"/>
             <a:ext cx="365760" cy="365760"/>
           </a:xfrm>
           <a:prstGeom prst="rect">
@@ -8462,7 +8462,7 @@
         </p:nvSpPr>
         <p:spPr>
           <a:xfrm>
-            <a:off x="1417320" y="3505200"/>
+            <a:off x="1417320" y="3124200"/>
             <a:ext cx="9174175" cy="600456"/>
           </a:xfrm>
           <a:prstGeom prst="rect">
@@ -8492,7 +8492,7 @@
                 <a:ea typeface="Arial" pitchFamily="34" charset="-122"/>
                 <a:cs typeface="Arial" pitchFamily="34" charset="-120"/>
               </a:rPr>
-              <a:t>Telmo mente, e Maria perdoa-lhe a mentira</a:t>
+              <a:t>Telmo mente, e Maria perdoa-lhe logo a mentira</a:t>
             </a:r>
             <a:endParaRPr lang="en-US" sz="2400" dirty="0"/>
           </a:p>
@@ -8506,7 +8506,7 @@
         </p:nvSpPr>
         <p:spPr>
           <a:xfrm>
-            <a:off x="822960" y="4096512"/>
+            <a:off x="822960" y="3715512"/>
             <a:ext cx="365760" cy="365760"/>
           </a:xfrm>
           <a:prstGeom prst="ellipse">
@@ -8531,7 +8531,7 @@
         </p:nvSpPr>
         <p:spPr>
           <a:xfrm>
-            <a:off x="822960" y="4096512"/>
+            <a:off x="822960" y="3715512"/>
             <a:ext cx="365760" cy="365760"/>
           </a:xfrm>
           <a:prstGeom prst="rect">
@@ -8570,7 +8570,7 @@
         </p:nvSpPr>
         <p:spPr>
           <a:xfrm>
-            <a:off x="1417320" y="4105656"/>
+            <a:off x="1417320" y="3724656"/>
             <a:ext cx="9174175" cy="600456"/>
           </a:xfrm>
           <a:prstGeom prst="rect">
@@ -8600,7 +8600,7 @@
                 <a:ea typeface="Arial" pitchFamily="34" charset="-122"/>
                 <a:cs typeface="Arial" pitchFamily="34" charset="-120"/>
               </a:rPr>
-              <a:t>Telmo diz a verdade, e Maria não acredita</a:t>
+              <a:t>Telmo diz a verdade, e Maria não acredita nele</a:t>
             </a:r>
             <a:endParaRPr lang="en-US" sz="2400" dirty="0"/>
           </a:p>
@@ -8614,7 +8614,7 @@
         </p:nvSpPr>
         <p:spPr>
           <a:xfrm>
-            <a:off x="822960" y="4696968"/>
+            <a:off x="822960" y="4315968"/>
             <a:ext cx="365760" cy="365760"/>
           </a:xfrm>
           <a:prstGeom prst="ellipse">
@@ -8639,7 +8639,7 @@
         </p:nvSpPr>
         <p:spPr>
           <a:xfrm>
-            <a:off x="822960" y="4696968"/>
+            <a:off x="822960" y="4315968"/>
             <a:ext cx="365760" cy="365760"/>
           </a:xfrm>
           <a:prstGeom prst="rect">
@@ -8678,7 +8678,7 @@
         </p:nvSpPr>
         <p:spPr>
           <a:xfrm>
-            <a:off x="1417320" y="4706112"/>
+            <a:off x="1417320" y="4325112"/>
             <a:ext cx="9174175" cy="600456"/>
           </a:xfrm>
           <a:prstGeom prst="rect">
@@ -8708,7 +8708,7 @@
                 <a:ea typeface="Arial" pitchFamily="34" charset="-122"/>
                 <a:cs typeface="Arial" pitchFamily="34" charset="-120"/>
               </a:rPr>
-              <a:t>Telmo não sabe de quem é o retrato, e Maria sabe</a:t>
+              <a:t>Telmo não sabe de quem é o retrato, e Maria sabe-o</a:t>
             </a:r>
             <a:endParaRPr lang="en-US" sz="2400" dirty="0"/>
           </a:p>
@@ -8951,7 +8951,7 @@
               <a:buNone/>
             </a:pPr>
             <a:r>
-              <a:rPr lang="en-US" sz="2800" b="1" dirty="0">
+              <a:rPr lang="en-US" sz="3400" b="1" dirty="0">
                 <a:solidFill>
                   <a:srgbClr val="F2F0EA"/>
                 </a:solidFill>
@@ -8959,9 +8959,9 @@
                 <a:ea typeface="Arial" pitchFamily="34" charset="-122"/>
                 <a:cs typeface="Arial" pitchFamily="34" charset="-120"/>
               </a:rPr>
-              <a:t>Telmo omite o nome; Maria chama a isso não dizer «a verdade toda», que é «quase o mesmo» que mentir</a:t>
-            </a:r>
-            <a:endParaRPr lang="en-US" sz="2800" dirty="0"/>
+              <a:t>Telmo omite o nome; Maria diz que é quase mentir</a:t>
+            </a:r>
+            <a:endParaRPr lang="en-US" sz="3400" dirty="0"/>
           </a:p>
         </p:txBody>
       </p:sp>
@@ -12048,7 +12048,7 @@
                 <a:ea typeface="Arial" pitchFamily="34" charset="-122"/>
                 <a:cs typeface="Arial" pitchFamily="34" charset="-120"/>
               </a:rPr>
-              <a:t>O gesto diz quem foi; a palavra diz o que já é: um homem sem lugar, sem nome e sem casa</a:t>
+              <a:t>O gesto diz quem foi; a palavra, que já não tem lugar</a:t>
             </a:r>
             <a:endParaRPr lang="en-US" sz="2400" dirty="0"/>
           </a:p>
@@ -12264,7 +12264,7 @@
                 <a:ea typeface="Arial" pitchFamily="34" charset="-122"/>
                 <a:cs typeface="Arial" pitchFamily="34" charset="-120"/>
               </a:rPr>
-              <a:t>Nega ser o homem do retrato</a:t>
+              <a:t>Nega ser ele o homem que está pintado no retrato</a:t>
             </a:r>
             <a:endParaRPr lang="en-US" sz="2400" dirty="0"/>
           </a:p>
@@ -12372,7 +12372,7 @@
                 <a:ea typeface="Arial" pitchFamily="34" charset="-122"/>
                 <a:cs typeface="Arial" pitchFamily="34" charset="-120"/>
               </a:rPr>
-              <a:t>Diz que o retrato é de um desconhecido</a:t>
+              <a:t>Diz que o retrato é de um desconhecido qualquer</a:t>
             </a:r>
             <a:endParaRPr lang="en-US" sz="2400" dirty="0"/>
           </a:p>
@@ -12623,7 +12623,7 @@
                 <a:ea typeface="Arial" pitchFamily="34" charset="-122"/>
                 <a:cs typeface="Arial" pitchFamily="34" charset="-120"/>
               </a:rPr>
-              <a:t>O gesto diz quem foi; a palavra diz o que já é: um homem sem lugar, sem nome e sem casa</a:t>
+              <a:t>O gesto diz quem foi; a palavra, que já não tem lugar</a:t>
             </a:r>
             <a:endParaRPr lang="en-US" sz="3400" dirty="0"/>
           </a:p>
@@ -13948,7 +13948,7 @@
         <p:spPr>
           <a:xfrm>
             <a:off x="1417320" y="2523744"/>
-            <a:ext cx="9174175" cy="1362456"/>
+            <a:ext cx="9174175" cy="981456"/>
           </a:xfrm>
           <a:prstGeom prst="rect">
             <a:avLst/>
@@ -13977,7 +13977,7 @@
                 <a:ea typeface="Arial" pitchFamily="34" charset="-122"/>
                 <a:cs typeface="Arial" pitchFamily="34" charset="-120"/>
               </a:rPr>
-              <a:t>Que minta diante de todos para lhe salvar o nome do pai; Madalena responde «Misericórdia, meu Deus!» e não mente</a:t>
+              <a:t>Que minta para lhe salvar o nome do pai; Madalena não mente</a:t>
             </a:r>
             <a:endParaRPr lang="en-US" sz="2400" dirty="0"/>
           </a:p>
@@ -13991,7 +13991,7 @@
         </p:nvSpPr>
         <p:spPr>
           <a:xfrm>
-            <a:off x="822960" y="3877056"/>
+            <a:off x="822960" y="3496056"/>
             <a:ext cx="365760" cy="365760"/>
           </a:xfrm>
           <a:prstGeom prst="ellipse">
@@ -14016,7 +14016,7 @@
         </p:nvSpPr>
         <p:spPr>
           <a:xfrm>
-            <a:off x="822960" y="3877056"/>
+            <a:off x="822960" y="3496056"/>
             <a:ext cx="365760" cy="365760"/>
           </a:xfrm>
           <a:prstGeom prst="rect">
@@ -14055,7 +14055,7 @@
         </p:nvSpPr>
         <p:spPr>
           <a:xfrm>
-            <a:off x="1417320" y="3886200"/>
+            <a:off x="1417320" y="3505200"/>
             <a:ext cx="9174175" cy="981456"/>
           </a:xfrm>
           <a:prstGeom prst="rect">
@@ -14099,7 +14099,7 @@
         </p:nvSpPr>
         <p:spPr>
           <a:xfrm>
-            <a:off x="822960" y="4858512"/>
+            <a:off x="822960" y="4477512"/>
             <a:ext cx="365760" cy="365760"/>
           </a:xfrm>
           <a:prstGeom prst="ellipse">
@@ -14124,7 +14124,7 @@
         </p:nvSpPr>
         <p:spPr>
           <a:xfrm>
-            <a:off x="822960" y="4858512"/>
+            <a:off x="822960" y="4477512"/>
             <a:ext cx="365760" cy="365760"/>
           </a:xfrm>
           <a:prstGeom prst="rect">
@@ -14163,8 +14163,8 @@
         </p:nvSpPr>
         <p:spPr>
           <a:xfrm>
-            <a:off x="1417320" y="4867656"/>
-            <a:ext cx="9174175" cy="600456"/>
+            <a:off x="1417320" y="4486656"/>
+            <a:ext cx="9174175" cy="981456"/>
           </a:xfrm>
           <a:prstGeom prst="rect">
             <a:avLst/>
@@ -14193,7 +14193,7 @@
                 <a:ea typeface="Arial" pitchFamily="34" charset="-122"/>
                 <a:cs typeface="Arial" pitchFamily="34" charset="-120"/>
               </a:rPr>
-              <a:t>Que diga a verdade toda; Madalena cala-se</a:t>
+              <a:t>Que diga a verdade toda diante de todos; Madalena cala-se</a:t>
             </a:r>
             <a:endParaRPr lang="en-US" sz="2400" dirty="0"/>
           </a:p>
@@ -14301,7 +14301,7 @@
                 <a:ea typeface="Arial" pitchFamily="34" charset="-122"/>
                 <a:cs typeface="Arial" pitchFamily="34" charset="-120"/>
               </a:rPr>
-              <a:t>Que entre no convento em seu lugar; Madalena recusa</a:t>
+              <a:t>Que vá para o convento em seu lugar; Madalena recusa</a:t>
             </a:r>
             <a:endParaRPr lang="en-US" sz="2400" dirty="0"/>
           </a:p>
@@ -14867,7 +14867,7 @@
               <a:buNone/>
             </a:pPr>
             <a:r>
-              <a:rPr lang="en-US" sz="2800" b="1" dirty="0">
+              <a:rPr lang="en-US" sz="3400" b="1" dirty="0">
                 <a:solidFill>
                   <a:srgbClr val="F2F0EA"/>
                 </a:solidFill>
@@ -14875,9 +14875,9 @@
                 <a:ea typeface="Arial" pitchFamily="34" charset="-122"/>
                 <a:cs typeface="Arial" pitchFamily="34" charset="-120"/>
               </a:rPr>
-              <a:t>Que minta diante de todos para lhe salvar o nome do pai; Madalena responde «Misericórdia, meu Deus!» e não mente</a:t>
-            </a:r>
-            <a:endParaRPr lang="en-US" sz="2800" dirty="0"/>
+              <a:t>Que minta para lhe salvar o nome do pai; Madalena não mente</a:t>
+            </a:r>
+            <a:endParaRPr lang="en-US" sz="3400" dirty="0"/>
           </a:p>
         </p:txBody>
       </p:sp>
@@ -17183,7 +17183,7 @@
         <p:spPr>
           <a:xfrm>
             <a:off x="1005840" y="2697480"/>
-            <a:ext cx="0" cy="2944368"/>
+            <a:ext cx="0" cy="2404618"/>
           </a:xfrm>
           <a:prstGeom prst="line">
             <a:avLst/>
@@ -17270,7 +17270,7 @@
         <p:spPr>
           <a:xfrm>
             <a:off x="1417320" y="2523744"/>
-            <a:ext cx="9174175" cy="1362456"/>
+            <a:ext cx="9174175" cy="917956"/>
           </a:xfrm>
           <a:prstGeom prst="rect">
             <a:avLst/>
@@ -17291,7 +17291,7 @@
               <a:buNone/>
             </a:pPr>
             <a:r>
-              <a:rPr lang="en-US" sz="2400" dirty="0">
+              <a:rPr lang="en-US" sz="2200" dirty="0">
                 <a:solidFill>
                   <a:srgbClr val="F2F0EA"/>
                 </a:solidFill>
@@ -17299,9 +17299,9 @@
                 <a:ea typeface="Arial" pitchFamily="34" charset="-122"/>
                 <a:cs typeface="Arial" pitchFamily="34" charset="-120"/>
               </a:rPr>
-              <a:t>Enfraquece-a: o Romeiro tenta dar a notícia sem se dar a si; é Jorge quem o leva aos retratos, e o reconhecimento sai-lhe «sem procurar»</a:t>
-            </a:r>
-            <a:endParaRPr lang="en-US" sz="2400" dirty="0"/>
+              <a:t>Enfraquece-a: o Romeiro quer dar a notícia sem se dar a si</a:t>
+            </a:r>
+            <a:endParaRPr lang="en-US" sz="2200" dirty="0"/>
           </a:p>
         </p:txBody>
       </p:sp>
@@ -17313,7 +17313,7 @@
         </p:nvSpPr>
         <p:spPr>
           <a:xfrm>
-            <a:off x="822960" y="3877056"/>
+            <a:off x="822960" y="3432556"/>
             <a:ext cx="365760" cy="365760"/>
           </a:xfrm>
           <a:prstGeom prst="ellipse">
@@ -17338,7 +17338,7 @@
         </p:nvSpPr>
         <p:spPr>
           <a:xfrm>
-            <a:off x="822960" y="3877056"/>
+            <a:off x="822960" y="3432556"/>
             <a:ext cx="365760" cy="365760"/>
           </a:xfrm>
           <a:prstGeom prst="rect">
@@ -17377,8 +17377,8 @@
         </p:nvSpPr>
         <p:spPr>
           <a:xfrm>
-            <a:off x="1417320" y="3886200"/>
-            <a:ext cx="9174175" cy="981456"/>
+            <a:off x="1417320" y="3441700"/>
+            <a:ext cx="9174175" cy="917956"/>
           </a:xfrm>
           <a:prstGeom prst="rect">
             <a:avLst/>
@@ -17399,7 +17399,7 @@
               <a:buNone/>
             </a:pPr>
             <a:r>
-              <a:rPr lang="en-US" sz="2400" dirty="0">
+              <a:rPr lang="en-US" sz="2200" dirty="0">
                 <a:solidFill>
                   <a:srgbClr val="F2F0EA"/>
                 </a:solidFill>
@@ -17407,9 +17407,9 @@
                 <a:ea typeface="Arial" pitchFamily="34" charset="-122"/>
                 <a:cs typeface="Arial" pitchFamily="34" charset="-120"/>
               </a:rPr>
-              <a:t>Confirma-a: a terceira pessoa é uma maneira de se fazer interessante</a:t>
-            </a:r>
-            <a:endParaRPr lang="en-US" sz="2400" dirty="0"/>
+              <a:t>Confirma-a: fala na terceira pessoa para se fazer interessante</a:t>
+            </a:r>
+            <a:endParaRPr lang="en-US" sz="2200" dirty="0"/>
           </a:p>
         </p:txBody>
       </p:sp>
@@ -17421,7 +17421,7 @@
         </p:nvSpPr>
         <p:spPr>
           <a:xfrm>
-            <a:off x="822960" y="4858512"/>
+            <a:off x="822960" y="4350512"/>
             <a:ext cx="365760" cy="365760"/>
           </a:xfrm>
           <a:prstGeom prst="ellipse">
@@ -17446,7 +17446,7 @@
         </p:nvSpPr>
         <p:spPr>
           <a:xfrm>
-            <a:off x="822960" y="4858512"/>
+            <a:off x="822960" y="4350512"/>
             <a:ext cx="365760" cy="365760"/>
           </a:xfrm>
           <a:prstGeom prst="rect">
@@ -17485,8 +17485,8 @@
         </p:nvSpPr>
         <p:spPr>
           <a:xfrm>
-            <a:off x="1417320" y="4867656"/>
-            <a:ext cx="9174175" cy="600456"/>
+            <a:off x="1417320" y="4359656"/>
+            <a:ext cx="9174175" cy="568706"/>
           </a:xfrm>
           <a:prstGeom prst="rect">
             <a:avLst/>
@@ -17507,7 +17507,7 @@
               <a:buNone/>
             </a:pPr>
             <a:r>
-              <a:rPr lang="en-US" sz="2400" dirty="0">
+              <a:rPr lang="en-US" sz="2200" dirty="0">
                 <a:solidFill>
                   <a:srgbClr val="F2F0EA"/>
                 </a:solidFill>
@@ -17515,9 +17515,9 @@
                 <a:ea typeface="Arial" pitchFamily="34" charset="-122"/>
                 <a:cs typeface="Arial" pitchFamily="34" charset="-120"/>
               </a:rPr>
-              <a:t>Não muda nada: o recado e o gesto são a mesma coisa</a:t>
-            </a:r>
-            <a:endParaRPr lang="en-US" sz="2400" dirty="0"/>
+              <a:t>Não muda nada: o recado e o gesto são uma e a mesma coisa</a:t>
+            </a:r>
+            <a:endParaRPr lang="en-US" sz="2200" dirty="0"/>
           </a:p>
         </p:txBody>
       </p:sp>
@@ -17529,7 +17529,7 @@
         </p:nvSpPr>
         <p:spPr>
           <a:xfrm>
-            <a:off x="822960" y="5458968"/>
+            <a:off x="822960" y="4919218"/>
             <a:ext cx="365760" cy="365760"/>
           </a:xfrm>
           <a:prstGeom prst="ellipse">
@@ -17554,7 +17554,7 @@
         </p:nvSpPr>
         <p:spPr>
           <a:xfrm>
-            <a:off x="822960" y="5458968"/>
+            <a:off x="822960" y="4919218"/>
             <a:ext cx="365760" cy="365760"/>
           </a:xfrm>
           <a:prstGeom prst="rect">
@@ -17593,8 +17593,8 @@
         </p:nvSpPr>
         <p:spPr>
           <a:xfrm>
-            <a:off x="1417320" y="5468112"/>
-            <a:ext cx="9174175" cy="600456"/>
+            <a:off x="1417320" y="4928362"/>
+            <a:ext cx="9174175" cy="568706"/>
           </a:xfrm>
           <a:prstGeom prst="rect">
             <a:avLst/>
@@ -17615,7 +17615,7 @@
               <a:buNone/>
             </a:pPr>
             <a:r>
-              <a:rPr lang="en-US" sz="2400" dirty="0">
+              <a:rPr lang="en-US" sz="2200" dirty="0">
                 <a:solidFill>
                   <a:srgbClr val="F2F0EA"/>
                 </a:solidFill>
@@ -17623,9 +17623,9 @@
                 <a:ea typeface="Arial" pitchFamily="34" charset="-122"/>
                 <a:cs typeface="Arial" pitchFamily="34" charset="-120"/>
               </a:rPr>
-              <a:t>Prova que o Romeiro mente: o homem do recado é outro</a:t>
-            </a:r>
-            <a:endParaRPr lang="en-US" sz="2400" dirty="0"/>
+              <a:t>Prova que o Romeiro mente: o homem de quem fala é outro</a:t>
+            </a:r>
+            <a:endParaRPr lang="en-US" sz="2200" dirty="0"/>
           </a:p>
         </p:txBody>
       </p:sp>
@@ -17866,7 +17866,7 @@
               <a:buNone/>
             </a:pPr>
             <a:r>
-              <a:rPr lang="en-US" sz="2800" b="1" dirty="0">
+              <a:rPr lang="en-US" sz="3400" b="1" dirty="0">
                 <a:solidFill>
                   <a:srgbClr val="F2F0EA"/>
                 </a:solidFill>
@@ -17874,9 +17874,9 @@
                 <a:ea typeface="Arial" pitchFamily="34" charset="-122"/>
                 <a:cs typeface="Arial" pitchFamily="34" charset="-120"/>
               </a:rPr>
-              <a:t>Enfraquece-a: o Romeiro tenta dar a notícia sem se dar a si; é Jorge quem o leva aos retratos, e o reconhecimento sai-lhe «sem procurar»</a:t>
-            </a:r>
-            <a:endParaRPr lang="en-US" sz="2800" dirty="0"/>
+              <a:t>Enfraquece-a: o Romeiro quer dar a notícia sem se dar a si</a:t>
+            </a:r>
+            <a:endParaRPr lang="en-US" sz="3400" dirty="0"/>
           </a:p>
         </p:txBody>
       </p:sp>
@@ -19738,7 +19738,7 @@
         <p:spPr>
           <a:xfrm>
             <a:off x="1005840" y="2697480"/>
-            <a:ext cx="0" cy="2944368"/>
+            <a:ext cx="0" cy="2563368"/>
           </a:xfrm>
           <a:prstGeom prst="line">
             <a:avLst/>
@@ -19825,7 +19825,7 @@
         <p:spPr>
           <a:xfrm>
             <a:off x="1417320" y="2523744"/>
-            <a:ext cx="9174175" cy="1362456"/>
+            <a:ext cx="9174175" cy="600456"/>
           </a:xfrm>
           <a:prstGeom prst="rect">
             <a:avLst/>
@@ -19854,7 +19854,7 @@
                 <a:ea typeface="Arial" pitchFamily="34" charset="-122"/>
                 <a:cs typeface="Arial" pitchFamily="34" charset="-120"/>
               </a:rPr>
-              <a:t>Não: no ato I ninguém sabia que D. João vivia; dizer tudo era dizer um medo, e o medo não muda a regra que a volta dele aciona</a:t>
+              <a:t>Não: no ato I ninguém sabia que D. João estava vivo</a:t>
             </a:r>
             <a:endParaRPr lang="en-US" sz="2400" dirty="0"/>
           </a:p>
@@ -19868,7 +19868,7 @@
         </p:nvSpPr>
         <p:spPr>
           <a:xfrm>
-            <a:off x="822960" y="3877056"/>
+            <a:off x="822960" y="3115056"/>
             <a:ext cx="365760" cy="365760"/>
           </a:xfrm>
           <a:prstGeom prst="ellipse">
@@ -19893,7 +19893,7 @@
         </p:nvSpPr>
         <p:spPr>
           <a:xfrm>
-            <a:off x="822960" y="3877056"/>
+            <a:off x="822960" y="3115056"/>
             <a:ext cx="365760" cy="365760"/>
           </a:xfrm>
           <a:prstGeom prst="rect">
@@ -19932,8 +19932,8 @@
         </p:nvSpPr>
         <p:spPr>
           <a:xfrm>
-            <a:off x="1417320" y="3886200"/>
-            <a:ext cx="9174175" cy="600456"/>
+            <a:off x="1417320" y="3124200"/>
+            <a:ext cx="9174175" cy="981456"/>
           </a:xfrm>
           <a:prstGeom prst="rect">
             <a:avLst/>
@@ -19962,7 +19962,7 @@
                 <a:ea typeface="Arial" pitchFamily="34" charset="-122"/>
                 <a:cs typeface="Arial" pitchFamily="34" charset="-120"/>
               </a:rPr>
-              <a:t>Sim: Manuel não teria casado se soubesse da carta</a:t>
+              <a:t>Sim: Manuel não teria casado se soubesse da carta antiga</a:t>
             </a:r>
             <a:endParaRPr lang="en-US" sz="2400" dirty="0"/>
           </a:p>
@@ -19976,7 +19976,7 @@
         </p:nvSpPr>
         <p:spPr>
           <a:xfrm>
-            <a:off x="822960" y="4477512"/>
+            <a:off x="822960" y="4096512"/>
             <a:ext cx="365760" cy="365760"/>
           </a:xfrm>
           <a:prstGeom prst="ellipse">
@@ -20001,7 +20001,7 @@
         </p:nvSpPr>
         <p:spPr>
           <a:xfrm>
-            <a:off x="822960" y="4477512"/>
+            <a:off x="822960" y="4096512"/>
             <a:ext cx="365760" cy="365760"/>
           </a:xfrm>
           <a:prstGeom prst="rect">
@@ -20040,7 +20040,7 @@
         </p:nvSpPr>
         <p:spPr>
           <a:xfrm>
-            <a:off x="1417320" y="4486656"/>
+            <a:off x="1417320" y="4105656"/>
             <a:ext cx="9174175" cy="981456"/>
           </a:xfrm>
           <a:prstGeom prst="rect">
@@ -20084,7 +20084,7 @@
         </p:nvSpPr>
         <p:spPr>
           <a:xfrm>
-            <a:off x="822960" y="5458968"/>
+            <a:off x="822960" y="5077968"/>
             <a:ext cx="365760" cy="365760"/>
           </a:xfrm>
           <a:prstGeom prst="ellipse">
@@ -20109,7 +20109,7 @@
         </p:nvSpPr>
         <p:spPr>
           <a:xfrm>
-            <a:off x="822960" y="5458968"/>
+            <a:off x="822960" y="5077968"/>
             <a:ext cx="365760" cy="365760"/>
           </a:xfrm>
           <a:prstGeom prst="rect">
@@ -20148,8 +20148,8 @@
         </p:nvSpPr>
         <p:spPr>
           <a:xfrm>
-            <a:off x="1417320" y="5468112"/>
-            <a:ext cx="9174175" cy="600456"/>
+            <a:off x="1417320" y="5087112"/>
+            <a:ext cx="9174175" cy="981456"/>
           </a:xfrm>
           <a:prstGeom prst="rect">
             <a:avLst/>
@@ -20178,7 +20178,7 @@
                 <a:ea typeface="Arial" pitchFamily="34" charset="-122"/>
                 <a:cs typeface="Arial" pitchFamily="34" charset="-120"/>
               </a:rPr>
-              <a:t>Não, porque Telmo teria mentido de qualquer maneira</a:t>
+              <a:t>Não, porque Telmo teria mentido a todos de qualquer maneira</a:t>
             </a:r>
             <a:endParaRPr lang="en-US" sz="2400" dirty="0"/>
           </a:p>
@@ -20421,7 +20421,7 @@
               <a:buNone/>
             </a:pPr>
             <a:r>
-              <a:rPr lang="en-US" sz="2800" b="1" dirty="0">
+              <a:rPr lang="en-US" sz="3400" b="1" dirty="0">
                 <a:solidFill>
                   <a:srgbClr val="F2F0EA"/>
                 </a:solidFill>
@@ -20429,9 +20429,9 @@
                 <a:ea typeface="Arial" pitchFamily="34" charset="-122"/>
                 <a:cs typeface="Arial" pitchFamily="34" charset="-120"/>
               </a:rPr>
-              <a:t>Não: no ato I ninguém sabia que D. João vivia; dizer tudo era dizer um medo, e o medo não muda a regra que a volta dele aciona</a:t>
-            </a:r>
-            <a:endParaRPr lang="en-US" sz="2800" dirty="0"/>
+              <a:t>Não: no ato I ninguém sabia que D. João estava vivo</a:t>
+            </a:r>
+            <a:endParaRPr lang="en-US" sz="3400" dirty="0"/>
           </a:p>
         </p:txBody>
       </p:sp>
@@ -23259,7 +23259,7 @@
         <p:spPr>
           <a:xfrm>
             <a:off x="1005840" y="2697480"/>
-            <a:ext cx="0" cy="2182368"/>
+            <a:ext cx="0" cy="1801368"/>
           </a:xfrm>
           <a:prstGeom prst="line">
             <a:avLst/>
@@ -23346,7 +23346,7 @@
         <p:spPr>
           <a:xfrm>
             <a:off x="1417320" y="2523744"/>
-            <a:ext cx="9174175" cy="981456"/>
+            <a:ext cx="9174175" cy="600456"/>
           </a:xfrm>
           <a:prstGeom prst="rect">
             <a:avLst/>
@@ -23375,7 +23375,7 @@
                 <a:ea typeface="Arial" pitchFamily="34" charset="-122"/>
                 <a:cs typeface="Arial" pitchFamily="34" charset="-120"/>
               </a:rPr>
-              <a:t>Que nunca apareceu, apesar de sete anos de buscas; da morte só tem «provas e testemunhos», não a certeza</a:t>
+              <a:t>Que nunca apareceu, apesar de sete anos de buscas</a:t>
             </a:r>
             <a:endParaRPr lang="en-US" sz="2400" dirty="0"/>
           </a:p>
@@ -23389,7 +23389,7 @@
         </p:nvSpPr>
         <p:spPr>
           <a:xfrm>
-            <a:off x="822960" y="3496056"/>
+            <a:off x="822960" y="3115056"/>
             <a:ext cx="365760" cy="365760"/>
           </a:xfrm>
           <a:prstGeom prst="ellipse">
@@ -23414,7 +23414,7 @@
         </p:nvSpPr>
         <p:spPr>
           <a:xfrm>
-            <a:off x="822960" y="3496056"/>
+            <a:off x="822960" y="3115056"/>
             <a:ext cx="365760" cy="365760"/>
           </a:xfrm>
           <a:prstGeom prst="rect">
@@ -23453,7 +23453,7 @@
         </p:nvSpPr>
         <p:spPr>
           <a:xfrm>
-            <a:off x="1417320" y="3505200"/>
+            <a:off x="1417320" y="3124200"/>
             <a:ext cx="9174175" cy="600456"/>
           </a:xfrm>
           <a:prstGeom prst="rect">
@@ -23483,7 +23483,7 @@
                 <a:ea typeface="Arial" pitchFamily="34" charset="-122"/>
                 <a:cs typeface="Arial" pitchFamily="34" charset="-120"/>
               </a:rPr>
-              <a:t>Que morreu na batalha, porque o viram cair</a:t>
+              <a:t>Que morreu em Alcácer Quibir, porque o viram cair</a:t>
             </a:r>
             <a:endParaRPr lang="en-US" sz="2400" dirty="0"/>
           </a:p>
@@ -23497,7 +23497,7 @@
         </p:nvSpPr>
         <p:spPr>
           <a:xfrm>
-            <a:off x="822960" y="4096512"/>
+            <a:off x="822960" y="3715512"/>
             <a:ext cx="365760" cy="365760"/>
           </a:xfrm>
           <a:prstGeom prst="ellipse">
@@ -23522,7 +23522,7 @@
         </p:nvSpPr>
         <p:spPr>
           <a:xfrm>
-            <a:off x="822960" y="4096512"/>
+            <a:off x="822960" y="3715512"/>
             <a:ext cx="365760" cy="365760"/>
           </a:xfrm>
           <a:prstGeom prst="rect">
@@ -23561,7 +23561,7 @@
         </p:nvSpPr>
         <p:spPr>
           <a:xfrm>
-            <a:off x="1417320" y="4105656"/>
+            <a:off x="1417320" y="3724656"/>
             <a:ext cx="9174175" cy="600456"/>
           </a:xfrm>
           <a:prstGeom prst="rect">
@@ -23591,7 +23591,7 @@
                 <a:ea typeface="Arial" pitchFamily="34" charset="-122"/>
                 <a:cs typeface="Arial" pitchFamily="34" charset="-120"/>
               </a:rPr>
-              <a:t>Que está vivo e cativo em Berberia</a:t>
+              <a:t>Que está vivo e cativo nas costas de Berberia</a:t>
             </a:r>
             <a:endParaRPr lang="en-US" sz="2400" dirty="0"/>
           </a:p>
@@ -23605,7 +23605,7 @@
         </p:nvSpPr>
         <p:spPr>
           <a:xfrm>
-            <a:off x="822960" y="4696968"/>
+            <a:off x="822960" y="4315968"/>
             <a:ext cx="365760" cy="365760"/>
           </a:xfrm>
           <a:prstGeom prst="ellipse">
@@ -23630,7 +23630,7 @@
         </p:nvSpPr>
         <p:spPr>
           <a:xfrm>
-            <a:off x="822960" y="4696968"/>
+            <a:off x="822960" y="4315968"/>
             <a:ext cx="365760" cy="365760"/>
           </a:xfrm>
           <a:prstGeom prst="rect">
@@ -23669,7 +23669,7 @@
         </p:nvSpPr>
         <p:spPr>
           <a:xfrm>
-            <a:off x="1417320" y="4706112"/>
+            <a:off x="1417320" y="4325112"/>
             <a:ext cx="9174175" cy="600456"/>
           </a:xfrm>
           <a:prstGeom prst="rect">
@@ -23699,7 +23699,7 @@
                 <a:ea typeface="Arial" pitchFamily="34" charset="-122"/>
                 <a:cs typeface="Arial" pitchFamily="34" charset="-120"/>
               </a:rPr>
-              <a:t>Que voltou e vive escondido em Almada</a:t>
+              <a:t>Que voltou há pouco e vive escondido em Almada</a:t>
             </a:r>
             <a:endParaRPr lang="en-US" sz="2400" dirty="0"/>
           </a:p>
@@ -24588,7 +24588,7 @@
               <a:buNone/>
             </a:pPr>
             <a:r>
-              <a:rPr lang="en-US" sz="2800" b="1" dirty="0">
+              <a:rPr lang="en-US" sz="3400" b="1" dirty="0">
                 <a:solidFill>
                   <a:srgbClr val="F2F0EA"/>
                 </a:solidFill>
@@ -24596,9 +24596,9 @@
                 <a:ea typeface="Arial" pitchFamily="34" charset="-122"/>
                 <a:cs typeface="Arial" pitchFamily="34" charset="-120"/>
               </a:rPr>
-              <a:t>Que nunca apareceu, apesar de sete anos de buscas; da morte só tem «provas e testemunhos», não a certeza</a:t>
-            </a:r>
-            <a:endParaRPr lang="en-US" sz="2800" dirty="0"/>
+              <a:t>Que nunca apareceu, apesar de sete anos de buscas</a:t>
+            </a:r>
+            <a:endParaRPr lang="en-US" sz="3400" dirty="0"/>
           </a:p>
         </p:txBody>
       </p:sp>
